--- a/SP 26/figs/signature_use.pptx
+++ b/SP 26/figs/signature_use.pptx
@@ -259,7 +259,7 @@
           <a:p>
             <a:fld id="{376A6109-DA25-A641-9224-4C6AC413BC32}" type="datetimeFigureOut">
               <a:rPr lang="en-US" smtClean="0"/>
-              <a:t>5/24/26</a:t>
+              <a:t>6/10/26</a:t>
             </a:fld>
             <a:endParaRPr lang="en-US"/>
           </a:p>
@@ -457,7 +457,7 @@
           <a:p>
             <a:fld id="{376A6109-DA25-A641-9224-4C6AC413BC32}" type="datetimeFigureOut">
               <a:rPr lang="en-US" smtClean="0"/>
-              <a:t>5/24/26</a:t>
+              <a:t>6/10/26</a:t>
             </a:fld>
             <a:endParaRPr lang="en-US"/>
           </a:p>
@@ -665,7 +665,7 @@
           <a:p>
             <a:fld id="{376A6109-DA25-A641-9224-4C6AC413BC32}" type="datetimeFigureOut">
               <a:rPr lang="en-US" smtClean="0"/>
-              <a:t>5/24/26</a:t>
+              <a:t>6/10/26</a:t>
             </a:fld>
             <a:endParaRPr lang="en-US"/>
           </a:p>
@@ -863,7 +863,7 @@
           <a:p>
             <a:fld id="{376A6109-DA25-A641-9224-4C6AC413BC32}" type="datetimeFigureOut">
               <a:rPr lang="en-US" smtClean="0"/>
-              <a:t>5/24/26</a:t>
+              <a:t>6/10/26</a:t>
             </a:fld>
             <a:endParaRPr lang="en-US"/>
           </a:p>
@@ -1138,7 +1138,7 @@
           <a:p>
             <a:fld id="{376A6109-DA25-A641-9224-4C6AC413BC32}" type="datetimeFigureOut">
               <a:rPr lang="en-US" smtClean="0"/>
-              <a:t>5/24/26</a:t>
+              <a:t>6/10/26</a:t>
             </a:fld>
             <a:endParaRPr lang="en-US"/>
           </a:p>
@@ -1403,7 +1403,7 @@
           <a:p>
             <a:fld id="{376A6109-DA25-A641-9224-4C6AC413BC32}" type="datetimeFigureOut">
               <a:rPr lang="en-US" smtClean="0"/>
-              <a:t>5/24/26</a:t>
+              <a:t>6/10/26</a:t>
             </a:fld>
             <a:endParaRPr lang="en-US"/>
           </a:p>
@@ -1815,7 +1815,7 @@
           <a:p>
             <a:fld id="{376A6109-DA25-A641-9224-4C6AC413BC32}" type="datetimeFigureOut">
               <a:rPr lang="en-US" smtClean="0"/>
-              <a:t>5/24/26</a:t>
+              <a:t>6/10/26</a:t>
             </a:fld>
             <a:endParaRPr lang="en-US"/>
           </a:p>
@@ -1956,7 +1956,7 @@
           <a:p>
             <a:fld id="{376A6109-DA25-A641-9224-4C6AC413BC32}" type="datetimeFigureOut">
               <a:rPr lang="en-US" smtClean="0"/>
-              <a:t>5/24/26</a:t>
+              <a:t>6/10/26</a:t>
             </a:fld>
             <a:endParaRPr lang="en-US"/>
           </a:p>
@@ -2069,7 +2069,7 @@
           <a:p>
             <a:fld id="{376A6109-DA25-A641-9224-4C6AC413BC32}" type="datetimeFigureOut">
               <a:rPr lang="en-US" smtClean="0"/>
-              <a:t>5/24/26</a:t>
+              <a:t>6/10/26</a:t>
             </a:fld>
             <a:endParaRPr lang="en-US"/>
           </a:p>
@@ -2380,7 +2380,7 @@
           <a:p>
             <a:fld id="{376A6109-DA25-A641-9224-4C6AC413BC32}" type="datetimeFigureOut">
               <a:rPr lang="en-US" smtClean="0"/>
-              <a:t>5/24/26</a:t>
+              <a:t>6/10/26</a:t>
             </a:fld>
             <a:endParaRPr lang="en-US"/>
           </a:p>
@@ -2668,7 +2668,7 @@
           <a:p>
             <a:fld id="{376A6109-DA25-A641-9224-4C6AC413BC32}" type="datetimeFigureOut">
               <a:rPr lang="en-US" smtClean="0"/>
-              <a:t>5/24/26</a:t>
+              <a:t>6/10/26</a:t>
             </a:fld>
             <a:endParaRPr lang="en-US"/>
           </a:p>
@@ -2909,7 +2909,7 @@
           <a:p>
             <a:fld id="{376A6109-DA25-A641-9224-4C6AC413BC32}" type="datetimeFigureOut">
               <a:rPr lang="en-US" smtClean="0"/>
-              <a:t>5/24/26</a:t>
+              <a:t>6/10/26</a:t>
             </a:fld>
             <a:endParaRPr lang="en-US"/>
           </a:p>
@@ -3354,7 +3354,7 @@
         </p:blipFill>
         <p:spPr>
           <a:xfrm>
-            <a:off x="6617442" y="2223978"/>
+            <a:off x="5931642" y="1347206"/>
             <a:ext cx="914400" cy="914400"/>
           </a:xfrm>
           <a:prstGeom prst="rect">
@@ -3390,7 +3390,7 @@
         </p:blipFill>
         <p:spPr>
           <a:xfrm>
-            <a:off x="10317782" y="2225010"/>
+            <a:off x="9631982" y="1259338"/>
             <a:ext cx="914400" cy="914400"/>
           </a:xfrm>
           <a:prstGeom prst="rect">
@@ -3426,7 +3426,7 @@
         </p:blipFill>
         <p:spPr>
           <a:xfrm>
-            <a:off x="2560017" y="2925242"/>
+            <a:off x="1874217" y="2048470"/>
             <a:ext cx="914400" cy="914400"/>
           </a:xfrm>
           <a:prstGeom prst="rect">
@@ -3462,7 +3462,7 @@
         </p:blipFill>
         <p:spPr>
           <a:xfrm>
-            <a:off x="4135523" y="1290181"/>
+            <a:off x="3449723" y="413409"/>
             <a:ext cx="914400" cy="914400"/>
           </a:xfrm>
           <a:prstGeom prst="rect">
@@ -3498,7 +3498,7 @@
         </p:blipFill>
         <p:spPr>
           <a:xfrm>
-            <a:off x="959818" y="1329277"/>
+            <a:off x="274018" y="452505"/>
             <a:ext cx="914400" cy="914400"/>
           </a:xfrm>
           <a:prstGeom prst="rect">
@@ -3506,132 +3506,8 @@
           </a:prstGeom>
         </p:spPr>
       </p:pic>
-      <p:cxnSp>
-        <p:nvCxnSpPr>
-          <p:cNvPr id="30" name="Straight Arrow Connector 29">
-            <a:extLst>
-              <a:ext uri="{FF2B5EF4-FFF2-40B4-BE49-F238E27FC236}">
-                <a16:creationId xmlns:a16="http://schemas.microsoft.com/office/drawing/2014/main" id="{D688F281-6BE5-E258-03E5-48EE6EE69AEF}"/>
-              </a:ext>
-            </a:extLst>
-          </p:cNvPr>
-          <p:cNvCxnSpPr/>
-          <p:nvPr/>
-        </p:nvCxnSpPr>
-        <p:spPr>
-          <a:xfrm>
-            <a:off x="2009686" y="1752610"/>
-            <a:ext cx="2150531" cy="0"/>
-          </a:xfrm>
-          <a:prstGeom prst="straightConnector1">
-            <a:avLst/>
-          </a:prstGeom>
-          <a:ln w="25400">
-            <a:headEnd type="triangle"/>
-            <a:tailEnd type="triangle"/>
-          </a:ln>
-        </p:spPr>
-        <p:style>
-          <a:lnRef idx="2">
-            <a:schemeClr val="dk1"/>
-          </a:lnRef>
-          <a:fillRef idx="0">
-            <a:schemeClr val="dk1"/>
-          </a:fillRef>
-          <a:effectRef idx="1">
-            <a:schemeClr val="dk1"/>
-          </a:effectRef>
-          <a:fontRef idx="minor">
-            <a:schemeClr val="tx1"/>
-          </a:fontRef>
-        </p:style>
-      </p:cxnSp>
-      <p:cxnSp>
-        <p:nvCxnSpPr>
-          <p:cNvPr id="31" name="Straight Arrow Connector 30">
-            <a:extLst>
-              <a:ext uri="{FF2B5EF4-FFF2-40B4-BE49-F238E27FC236}">
-                <a16:creationId xmlns:a16="http://schemas.microsoft.com/office/drawing/2014/main" id="{F28B8F52-AEEA-D2B7-560A-0BC8C034DF53}"/>
-              </a:ext>
-            </a:extLst>
-          </p:cNvPr>
-          <p:cNvCxnSpPr>
-            <a:cxnSpLocks/>
-          </p:cNvCxnSpPr>
-          <p:nvPr/>
-        </p:nvCxnSpPr>
-        <p:spPr>
-          <a:xfrm>
-            <a:off x="1438187" y="2172793"/>
-            <a:ext cx="1142998" cy="1172631"/>
-          </a:xfrm>
-          <a:prstGeom prst="straightConnector1">
-            <a:avLst/>
-          </a:prstGeom>
-          <a:ln w="25400">
-            <a:headEnd type="triangle"/>
-            <a:tailEnd type="triangle"/>
-          </a:ln>
-        </p:spPr>
-        <p:style>
-          <a:lnRef idx="2">
-            <a:schemeClr val="dk1"/>
-          </a:lnRef>
-          <a:fillRef idx="0">
-            <a:schemeClr val="dk1"/>
-          </a:fillRef>
-          <a:effectRef idx="1">
-            <a:schemeClr val="dk1"/>
-          </a:effectRef>
-          <a:fontRef idx="minor">
-            <a:schemeClr val="tx1"/>
-          </a:fontRef>
-        </p:style>
-      </p:cxnSp>
-      <p:cxnSp>
-        <p:nvCxnSpPr>
-          <p:cNvPr id="33" name="Straight Arrow Connector 32">
-            <a:extLst>
-              <a:ext uri="{FF2B5EF4-FFF2-40B4-BE49-F238E27FC236}">
-                <a16:creationId xmlns:a16="http://schemas.microsoft.com/office/drawing/2014/main" id="{5D24564B-60A3-45B2-E4A8-399FBF20C5EA}"/>
-              </a:ext>
-            </a:extLst>
-          </p:cNvPr>
-          <p:cNvCxnSpPr>
-            <a:cxnSpLocks/>
-          </p:cNvCxnSpPr>
-          <p:nvPr/>
-        </p:nvCxnSpPr>
-        <p:spPr>
-          <a:xfrm flipV="1">
-            <a:off x="3474417" y="2091277"/>
-            <a:ext cx="1143000" cy="1291165"/>
-          </a:xfrm>
-          <a:prstGeom prst="straightConnector1">
-            <a:avLst/>
-          </a:prstGeom>
-          <a:ln w="25400">
-            <a:headEnd type="triangle"/>
-            <a:tailEnd type="triangle"/>
-          </a:ln>
-        </p:spPr>
-        <p:style>
-          <a:lnRef idx="2">
-            <a:schemeClr val="dk1"/>
-          </a:lnRef>
-          <a:fillRef idx="0">
-            <a:schemeClr val="dk1"/>
-          </a:fillRef>
-          <a:effectRef idx="1">
-            <a:schemeClr val="dk1"/>
-          </a:effectRef>
-          <a:fontRef idx="minor">
-            <a:schemeClr val="tx1"/>
-          </a:fontRef>
-        </p:style>
-      </p:cxnSp>
-      <mc:AlternateContent xmlns:mc="http://schemas.openxmlformats.org/markup-compatibility/2006" xmlns:a14="http://schemas.microsoft.com/office/drawing/2010/main">
-        <mc:Choice Requires="a14">
+      <mc:AlternateContent xmlns:mc="http://schemas.openxmlformats.org/markup-compatibility/2006">
+        <mc:Choice xmlns:a14="http://schemas.microsoft.com/office/drawing/2010/main" Requires="a14">
           <p:sp>
             <p:nvSpPr>
               <p:cNvPr id="37" name="TextBox 36">
@@ -3646,8 +3522,8 @@
             </p:nvSpPr>
             <p:spPr>
               <a:xfrm>
-                <a:off x="2077702" y="2243677"/>
-                <a:ext cx="1595758" cy="369332"/>
+                <a:off x="1140899" y="1343277"/>
+                <a:ext cx="2381036" cy="523220"/>
               </a:xfrm>
               <a:prstGeom prst="rect">
                 <a:avLst/>
@@ -3675,7 +3551,7 @@
                       <m:sSub>
                         <m:sSubPr>
                           <m:ctrlPr>
-                            <a:rPr lang="en-US" b="0" i="1" smtClean="0">
+                            <a:rPr lang="en-US" sz="2800" b="0" i="1" smtClean="0">
                               <a:latin typeface="Cambria Math" panose="02040503050406030204" pitchFamily="18" charset="0"/>
                             </a:rPr>
                           </m:ctrlPr>
@@ -3685,7 +3561,7 @@
                             <m:rPr>
                               <m:sty m:val="p"/>
                             </m:rPr>
-                            <a:rPr lang="el-GR" b="0" i="0" smtClean="0">
+                            <a:rPr lang="el-GR" sz="2800" b="0" i="0" smtClean="0">
                               <a:latin typeface="Cambria Math" panose="02040503050406030204" pitchFamily="18" charset="0"/>
                             </a:rPr>
                             <m:t>Τ</m:t>
@@ -3693,7 +3569,7 @@
                         </m:e>
                         <m:sub>
                           <m:r>
-                            <a:rPr lang="en-US" b="0" i="1" smtClean="0">
+                            <a:rPr lang="en-US" sz="2800" b="0" i="1" smtClean="0">
                               <a:latin typeface="Cambria Math" panose="02040503050406030204" pitchFamily="18" charset="0"/>
                             </a:rPr>
                             <m:t>𝐵</m:t>
@@ -3701,7 +3577,7 @@
                         </m:sub>
                       </m:sSub>
                       <m:r>
-                        <a:rPr lang="en-US" b="0" i="1" smtClean="0">
+                        <a:rPr lang="en-US" sz="2800" b="0" i="1" smtClean="0">
                           <a:latin typeface="Cambria Math" panose="02040503050406030204" pitchFamily="18" charset="0"/>
                         </a:rPr>
                         <m:t>=</m:t>
@@ -3710,13 +3586,13 @@
                         <m:rPr>
                           <m:sty m:val="p"/>
                         </m:rPr>
-                        <a:rPr lang="en-US" b="0" i="1" smtClean="0">
+                        <a:rPr lang="en-US" sz="2800" b="0" i="1" smtClean="0">
                           <a:latin typeface="Cambria Math" panose="02040503050406030204" pitchFamily="18" charset="0"/>
                         </a:rPr>
                         <m:t>SIGN</m:t>
                       </m:r>
                       <m:r>
-                        <a:rPr lang="en-US" b="0" i="1" smtClean="0">
+                        <a:rPr lang="en-US" sz="2800" b="0" i="1" smtClean="0">
                           <a:latin typeface="Cambria Math" panose="02040503050406030204" pitchFamily="18" charset="0"/>
                         </a:rPr>
                         <m:t>(</m:t>
@@ -3725,13 +3601,13 @@
                         <m:rPr>
                           <m:sty m:val="p"/>
                         </m:rPr>
-                        <a:rPr lang="en-US" b="0" i="1" smtClean="0">
+                        <a:rPr lang="en-US" sz="2800" b="0" i="1" smtClean="0">
                           <a:latin typeface="Cambria Math" panose="02040503050406030204" pitchFamily="18" charset="0"/>
                         </a:rPr>
                         <m:t>B</m:t>
                       </m:r>
                       <m:r>
-                        <a:rPr lang="en-US" b="0" i="1" smtClean="0">
+                        <a:rPr lang="en-US" sz="2800" b="0" i="1" smtClean="0">
                           <a:latin typeface="Cambria Math" panose="02040503050406030204" pitchFamily="18" charset="0"/>
                         </a:rPr>
                         <m:t>)</m:t>
@@ -3739,12 +3615,12 @@
                     </m:oMath>
                   </m:oMathPara>
                 </a14:m>
-                <a:endParaRPr lang="en-US" dirty="0"/>
+                <a:endParaRPr lang="en-US" sz="2800" dirty="0"/>
               </a:p>
             </p:txBody>
           </p:sp>
         </mc:Choice>
-        <mc:Fallback xmlns="">
+        <mc:Fallback>
           <p:sp>
             <p:nvSpPr>
               <p:cNvPr id="37" name="TextBox 36">
@@ -3761,8 +3637,8 @@
             </p:nvSpPr>
             <p:spPr>
               <a:xfrm>
-                <a:off x="2077702" y="2243677"/>
-                <a:ext cx="1595758" cy="369332"/>
+                <a:off x="1140899" y="1343277"/>
+                <a:ext cx="2381036" cy="523220"/>
               </a:xfrm>
               <a:prstGeom prst="rect">
                 <a:avLst/>
@@ -3770,7 +3646,7 @@
               <a:blipFill>
                 <a:blip r:embed="rId5"/>
                 <a:stretch>
-                  <a:fillRect b="-12903"/>
+                  <a:fillRect r="-1058" b="-16279"/>
                 </a:stretch>
               </a:blipFill>
               <a:ln>
@@ -3810,7 +3686,7 @@
         </p:nvCxnSpPr>
         <p:spPr>
           <a:xfrm>
-            <a:off x="4841577" y="2727328"/>
+            <a:off x="4155777" y="1850556"/>
             <a:ext cx="1572381" cy="5359"/>
           </a:xfrm>
           <a:prstGeom prst="straightConnector1">
@@ -3851,8 +3727,8 @@
             </p:nvSpPr>
             <p:spPr>
               <a:xfrm>
-                <a:off x="5972054" y="3207896"/>
-                <a:ext cx="2846677" cy="369332"/>
+                <a:off x="4658614" y="2208949"/>
+                <a:ext cx="3139064" cy="523220"/>
               </a:xfrm>
               <a:prstGeom prst="rect">
                 <a:avLst/>
@@ -3878,34 +3754,37 @@
                     </m:oMathParaPr>
                     <m:oMath xmlns:m="http://schemas.openxmlformats.org/officeDocument/2006/math">
                       <m:r>
-                        <a:rPr lang="en-US" b="0" i="1" smtClean="0">
+                        <a:rPr lang="en-US" sz="2800" b="0" i="1" smtClean="0">
                           <a:latin typeface="Cambria Math" panose="02040503050406030204" pitchFamily="18" charset="0"/>
                         </a:rPr>
                         <m:t> </m:t>
                       </m:r>
                       <m:r>
-                        <a:rPr lang="en-US" b="0" i="1" smtClean="0">
+                        <m:rPr>
+                          <m:sty m:val="p"/>
+                        </m:rPr>
+                        <a:rPr lang="en-US" sz="2800" b="0" i="1" smtClean="0">
                           <a:latin typeface="Cambria Math" panose="02040503050406030204" pitchFamily="18" charset="0"/>
                         </a:rPr>
-                        <m:t>𝐷𝑎𝑡𝑎</m:t>
+                        <m:t>y</m:t>
                       </m:r>
                       <m:r>
                         <m:rPr>
                           <m:lit/>
                         </m:rPr>
-                        <a:rPr lang="en-US" b="0" i="1" smtClean="0">
+                        <a:rPr lang="en-US" sz="2800" b="0" i="1" smtClean="0">
                           <a:latin typeface="Cambria Math" panose="02040503050406030204" pitchFamily="18" charset="0"/>
                         </a:rPr>
                         <m:t>/</m:t>
                       </m:r>
                       <m:r>
-                        <a:rPr lang="en-US" b="0" i="1" smtClean="0">
+                        <a:rPr lang="en-US" sz="2800" b="0" i="1" smtClean="0">
                           <a:latin typeface="Cambria Math" panose="02040503050406030204" pitchFamily="18" charset="0"/>
                         </a:rPr>
                         <m:t>⊥=</m:t>
                       </m:r>
                       <m:r>
-                        <a:rPr lang="en-US" b="0" i="1" smtClean="0">
+                        <a:rPr lang="en-US" sz="2800" b="0" i="1" smtClean="0">
                           <a:latin typeface="Cambria Math" panose="02040503050406030204" pitchFamily="18" charset="0"/>
                         </a:rPr>
                         <m:t>𝐴𝑈𝑇𝐻</m:t>
@@ -3913,64 +3792,36 @@
                       <m:d>
                         <m:dPr>
                           <m:ctrlPr>
-                            <a:rPr lang="en-US" b="0" i="1" smtClean="0">
+                            <a:rPr lang="en-US" sz="2800" b="0" i="1" smtClean="0">
                               <a:latin typeface="Cambria Math" panose="02040503050406030204" pitchFamily="18" charset="0"/>
                             </a:rPr>
                           </m:ctrlPr>
                         </m:dPr>
                         <m:e>
                           <m:r>
-                            <a:rPr lang="en-US" b="0" i="1" smtClean="0">
+                            <a:rPr lang="en-US" sz="2800" b="0" i="1" smtClean="0">
                               <a:latin typeface="Cambria Math" panose="02040503050406030204" pitchFamily="18" charset="0"/>
                             </a:rPr>
                             <m:t>𝐵</m:t>
                           </m:r>
                           <m:r>
-                            <a:rPr lang="en-US" b="0" i="1" smtClean="0">
+                            <a:rPr lang="en-US" sz="2800" b="0" i="1" smtClean="0">
                               <a:latin typeface="Cambria Math" panose="02040503050406030204" pitchFamily="18" charset="0"/>
                             </a:rPr>
                             <m:t>,</m:t>
                           </m:r>
-                          <m:sSub>
-                            <m:sSubPr>
-                              <m:ctrlPr>
-                                <a:rPr lang="en-US" b="0" i="1" smtClean="0">
-                                  <a:latin typeface="Cambria Math" panose="02040503050406030204" pitchFamily="18" charset="0"/>
-                                </a:rPr>
-                              </m:ctrlPr>
-                            </m:sSubPr>
-                            <m:e>
-                              <m:r>
-                                <a:rPr lang="en-US" b="0" i="1" smtClean="0">
-                                  <a:latin typeface="Cambria Math" panose="02040503050406030204" pitchFamily="18" charset="0"/>
-                                </a:rPr>
-                                <m:t>𝐶</m:t>
-                              </m:r>
-                            </m:e>
-                            <m:sub>
-                              <m:r>
-                                <a:rPr lang="en-US" b="0" i="1" smtClean="0">
-                                  <a:latin typeface="Cambria Math" panose="02040503050406030204" pitchFamily="18" charset="0"/>
-                                </a:rPr>
-                                <m:t>𝑑</m:t>
-                              </m:r>
-                              <m:r>
-                                <m:rPr>
-                                  <m:sty m:val="p"/>
-                                </m:rPr>
-                                <a:rPr lang="en-US" b="0" i="1" smtClean="0">
-                                  <a:latin typeface="Cambria Math" panose="02040503050406030204" pitchFamily="18" charset="0"/>
-                                </a:rPr>
-                                <m:t>ata</m:t>
-                              </m:r>
-                            </m:sub>
-                          </m:sSub>
+                          <m:r>
+                            <a:rPr lang="en-US" sz="2800" b="0" i="1" smtClean="0">
+                              <a:latin typeface="Cambria Math" panose="02040503050406030204" pitchFamily="18" charset="0"/>
+                            </a:rPr>
+                            <m:t>𝐶</m:t>
+                          </m:r>
                         </m:e>
                       </m:d>
                     </m:oMath>
                   </m:oMathPara>
                 </a14:m>
-                <a:endParaRPr lang="en-US" dirty="0"/>
+                <a:endParaRPr lang="en-US" sz="2800" dirty="0"/>
               </a:p>
             </p:txBody>
           </p:sp>
@@ -3992,8 +3843,8 @@
             </p:nvSpPr>
             <p:spPr>
               <a:xfrm>
-                <a:off x="5972054" y="3207896"/>
-                <a:ext cx="2846677" cy="369332"/>
+                <a:off x="4658614" y="2208949"/>
+                <a:ext cx="3139064" cy="523220"/>
               </a:xfrm>
               <a:prstGeom prst="rect">
                 <a:avLst/>
@@ -4001,7 +3852,7 @@
               <a:blipFill>
                 <a:blip r:embed="rId6"/>
                 <a:stretch>
-                  <a:fillRect b="-12903"/>
+                  <a:fillRect l="-1606" b="-20930"/>
                 </a:stretch>
               </a:blipFill>
               <a:ln>
@@ -4025,183 +3876,8 @@
           </p:sp>
         </mc:Fallback>
       </mc:AlternateContent>
-      <p:sp>
-        <p:nvSpPr>
-          <p:cNvPr id="95" name="TextBox 94">
-            <a:extLst>
-              <a:ext uri="{FF2B5EF4-FFF2-40B4-BE49-F238E27FC236}">
-                <a16:creationId xmlns:a16="http://schemas.microsoft.com/office/drawing/2014/main" id="{4D0A5299-94CA-9B71-7E4A-C6E077D2761B}"/>
-              </a:ext>
-            </a:extLst>
-          </p:cNvPr>
-          <p:cNvSpPr txBox="1"/>
-          <p:nvPr/>
-        </p:nvSpPr>
-        <p:spPr>
-          <a:xfrm>
-            <a:off x="147017" y="1634077"/>
-            <a:ext cx="911275" cy="369332"/>
-          </a:xfrm>
-          <a:prstGeom prst="rect">
-            <a:avLst/>
-          </a:prstGeom>
-          <a:noFill/>
-        </p:spPr>
-        <p:txBody>
-          <a:bodyPr wrap="none" rtlCol="0">
-            <a:spAutoFit/>
-          </a:bodyPr>
-          <a:lstStyle/>
-          <a:p>
-            <a:r>
-              <a:rPr lang="en-US" dirty="0"/>
-              <a:t>Auditor</a:t>
-            </a:r>
-          </a:p>
-        </p:txBody>
-      </p:sp>
-      <p:sp>
-        <p:nvSpPr>
-          <p:cNvPr id="96" name="TextBox 95">
-            <a:extLst>
-              <a:ext uri="{FF2B5EF4-FFF2-40B4-BE49-F238E27FC236}">
-                <a16:creationId xmlns:a16="http://schemas.microsoft.com/office/drawing/2014/main" id="{8E859498-C84F-4C9C-8DE4-04B715594C03}"/>
-              </a:ext>
-            </a:extLst>
-          </p:cNvPr>
-          <p:cNvSpPr txBox="1"/>
-          <p:nvPr/>
-        </p:nvSpPr>
-        <p:spPr>
-          <a:xfrm>
-            <a:off x="4973219" y="1601811"/>
-            <a:ext cx="911275" cy="369332"/>
-          </a:xfrm>
-          <a:prstGeom prst="rect">
-            <a:avLst/>
-          </a:prstGeom>
-          <a:noFill/>
-        </p:spPr>
-        <p:txBody>
-          <a:bodyPr wrap="none" rtlCol="0">
-            <a:spAutoFit/>
-          </a:bodyPr>
-          <a:lstStyle/>
-          <a:p>
-            <a:r>
-              <a:rPr lang="en-US" dirty="0"/>
-              <a:t>Auditor</a:t>
-            </a:r>
-          </a:p>
-        </p:txBody>
-      </p:sp>
-      <p:sp>
-        <p:nvSpPr>
-          <p:cNvPr id="97" name="TextBox 96">
-            <a:extLst>
-              <a:ext uri="{FF2B5EF4-FFF2-40B4-BE49-F238E27FC236}">
-                <a16:creationId xmlns:a16="http://schemas.microsoft.com/office/drawing/2014/main" id="{724C88D2-4322-A838-2370-C63D36A169FC}"/>
-              </a:ext>
-            </a:extLst>
-          </p:cNvPr>
-          <p:cNvSpPr txBox="1"/>
-          <p:nvPr/>
-        </p:nvSpPr>
-        <p:spPr>
-          <a:xfrm>
-            <a:off x="2623742" y="3814180"/>
-            <a:ext cx="911275" cy="369332"/>
-          </a:xfrm>
-          <a:prstGeom prst="rect">
-            <a:avLst/>
-          </a:prstGeom>
-          <a:noFill/>
-        </p:spPr>
-        <p:txBody>
-          <a:bodyPr wrap="none" rtlCol="0">
-            <a:spAutoFit/>
-          </a:bodyPr>
-          <a:lstStyle/>
-          <a:p>
-            <a:r>
-              <a:rPr lang="en-US" dirty="0"/>
-              <a:t>Auditor</a:t>
-            </a:r>
-          </a:p>
-        </p:txBody>
-      </p:sp>
-      <p:sp>
-        <p:nvSpPr>
-          <p:cNvPr id="98" name="TextBox 97">
-            <a:extLst>
-              <a:ext uri="{FF2B5EF4-FFF2-40B4-BE49-F238E27FC236}">
-                <a16:creationId xmlns:a16="http://schemas.microsoft.com/office/drawing/2014/main" id="{154A2621-ADA9-3EA0-0925-60E6CB161F64}"/>
-              </a:ext>
-            </a:extLst>
-          </p:cNvPr>
-          <p:cNvSpPr txBox="1"/>
-          <p:nvPr/>
-        </p:nvSpPr>
-        <p:spPr>
-          <a:xfrm>
-            <a:off x="6733676" y="1468401"/>
-            <a:ext cx="817468" cy="369332"/>
-          </a:xfrm>
-          <a:prstGeom prst="rect">
-            <a:avLst/>
-          </a:prstGeom>
-          <a:noFill/>
-        </p:spPr>
-        <p:txBody>
-          <a:bodyPr wrap="none" rtlCol="0">
-            <a:spAutoFit/>
-          </a:bodyPr>
-          <a:lstStyle/>
-          <a:p>
-            <a:r>
-              <a:rPr lang="en-US" dirty="0"/>
-              <a:t>Server</a:t>
-            </a:r>
-          </a:p>
-        </p:txBody>
-      </p:sp>
-      <p:sp>
-        <p:nvSpPr>
-          <p:cNvPr id="101" name="TextBox 100">
-            <a:extLst>
-              <a:ext uri="{FF2B5EF4-FFF2-40B4-BE49-F238E27FC236}">
-                <a16:creationId xmlns:a16="http://schemas.microsoft.com/office/drawing/2014/main" id="{01D79400-6F38-E966-33C1-205DB9FD0C29}"/>
-              </a:ext>
-            </a:extLst>
-          </p:cNvPr>
-          <p:cNvSpPr txBox="1"/>
-          <p:nvPr/>
-        </p:nvSpPr>
-        <p:spPr>
-          <a:xfrm>
-            <a:off x="10351253" y="1468401"/>
-            <a:ext cx="782587" cy="369332"/>
-          </a:xfrm>
-          <a:prstGeom prst="rect">
-            <a:avLst/>
-          </a:prstGeom>
-          <a:noFill/>
-        </p:spPr>
-        <p:txBody>
-          <a:bodyPr wrap="none" rtlCol="0">
-            <a:spAutoFit/>
-          </a:bodyPr>
-          <a:lstStyle/>
-          <a:p>
-            <a:r>
-              <a:rPr lang="en-US" dirty="0"/>
-              <a:t>Client</a:t>
-            </a:r>
-          </a:p>
-        </p:txBody>
-      </p:sp>
-      <mc:AlternateContent xmlns:mc="http://schemas.openxmlformats.org/markup-compatibility/2006">
-        <mc:Choice xmlns:a14="http://schemas.microsoft.com/office/drawing/2010/main" Requires="a14">
+      <mc:AlternateContent xmlns:mc="http://schemas.openxmlformats.org/markup-compatibility/2006" xmlns:a14="http://schemas.microsoft.com/office/drawing/2010/main">
+        <mc:Choice Requires="a14">
           <p:sp>
             <p:nvSpPr>
               <p:cNvPr id="102" name="TextBox 101">
@@ -4216,17 +3892,15 @@
             </p:nvSpPr>
             <p:spPr>
               <a:xfrm>
-                <a:off x="8397737" y="2041333"/>
-                <a:ext cx="788229" cy="369332"/>
+                <a:off x="7641166" y="1302034"/>
+                <a:ext cx="488980" cy="523220"/>
               </a:xfrm>
               <a:prstGeom prst="rect">
                 <a:avLst/>
               </a:prstGeom>
               <a:noFill/>
               <a:ln>
-                <a:solidFill>
-                  <a:schemeClr val="dk1"/>
-                </a:solidFill>
+                <a:noFill/>
               </a:ln>
             </p:spPr>
             <p:txBody>
@@ -4242,55 +3916,21 @@
                       <m:jc m:val="centerGroup"/>
                     </m:oMathParaPr>
                     <m:oMath xmlns:m="http://schemas.openxmlformats.org/officeDocument/2006/math">
-                      <m:sSub>
-                        <m:sSubPr>
-                          <m:ctrlPr>
-                            <a:rPr lang="en-US" b="0" i="1" smtClean="0">
-                              <a:latin typeface="Cambria Math" panose="02040503050406030204" pitchFamily="18" charset="0"/>
-                            </a:rPr>
-                          </m:ctrlPr>
-                        </m:sSubPr>
-                        <m:e>
-                          <m:r>
-                            <a:rPr lang="en-US" b="0" i="1" smtClean="0">
-                              <a:latin typeface="Cambria Math" panose="02040503050406030204" pitchFamily="18" charset="0"/>
-                            </a:rPr>
-                            <m:t> </m:t>
-                          </m:r>
-                          <m:r>
-                            <a:rPr lang="en-US" b="0" i="1" smtClean="0">
-                              <a:latin typeface="Cambria Math" panose="02040503050406030204" pitchFamily="18" charset="0"/>
-                            </a:rPr>
-                            <m:t>𝐶</m:t>
-                          </m:r>
-                        </m:e>
-                        <m:sub>
-                          <m:r>
-                            <a:rPr lang="en-US" b="0" i="1" smtClean="0">
-                              <a:latin typeface="Cambria Math" panose="02040503050406030204" pitchFamily="18" charset="0"/>
-                            </a:rPr>
-                            <m:t>𝐷</m:t>
-                          </m:r>
-                          <m:r>
-                            <m:rPr>
-                              <m:sty m:val="p"/>
-                            </m:rPr>
-                            <a:rPr lang="en-US" b="0" i="1" smtClean="0">
-                              <a:latin typeface="Cambria Math" panose="02040503050406030204" pitchFamily="18" charset="0"/>
-                            </a:rPr>
-                            <m:t>ata</m:t>
-                          </m:r>
-                        </m:sub>
-                      </m:sSub>
+                      <m:r>
+                        <a:rPr lang="en-US" sz="2800" b="0" i="1" smtClean="0">
+                          <a:latin typeface="Cambria Math" panose="02040503050406030204" pitchFamily="18" charset="0"/>
+                        </a:rPr>
+                        <m:t>𝐶</m:t>
+                      </m:r>
                     </m:oMath>
                   </m:oMathPara>
                 </a14:m>
-                <a:endParaRPr lang="en-US" dirty="0"/>
+                <a:endParaRPr lang="en-US" sz="2800" dirty="0"/>
               </a:p>
             </p:txBody>
           </p:sp>
         </mc:Choice>
-        <mc:Fallback>
+        <mc:Fallback xmlns="">
           <p:sp>
             <p:nvSpPr>
               <p:cNvPr id="102" name="TextBox 101">
@@ -4307,8 +3947,8 @@
             </p:nvSpPr>
             <p:spPr>
               <a:xfrm>
-                <a:off x="8397737" y="2041333"/>
-                <a:ext cx="788229" cy="369332"/>
+                <a:off x="7641166" y="1302034"/>
+                <a:ext cx="488980" cy="523220"/>
               </a:xfrm>
               <a:prstGeom prst="rect">
                 <a:avLst/>
@@ -4316,13 +3956,11 @@
               <a:blipFill>
                 <a:blip r:embed="rId7"/>
                 <a:stretch>
-                  <a:fillRect b="-12903"/>
+                  <a:fillRect/>
                 </a:stretch>
               </a:blipFill>
               <a:ln>
-                <a:solidFill>
-                  <a:schemeClr val="dk1"/>
-                </a:solidFill>
+                <a:noFill/>
               </a:ln>
             </p:spPr>
             <p:txBody>
@@ -4356,7 +3994,7 @@
         </p:nvCxnSpPr>
         <p:spPr>
           <a:xfrm>
-            <a:off x="7531842" y="2589855"/>
+            <a:off x="6775271" y="1850556"/>
             <a:ext cx="2687598" cy="0"/>
           </a:xfrm>
           <a:prstGeom prst="straightConnector1">
@@ -4382,41 +4020,101 @@
           </a:fontRef>
         </p:style>
       </p:cxnSp>
-      <p:sp>
-        <p:nvSpPr>
-          <p:cNvPr id="111" name="TextBox 110">
-            <a:extLst>
-              <a:ext uri="{FF2B5EF4-FFF2-40B4-BE49-F238E27FC236}">
-                <a16:creationId xmlns:a16="http://schemas.microsoft.com/office/drawing/2014/main" id="{C1D9E375-D93C-69DA-0B8E-2AA6961B8FA1}"/>
-              </a:ext>
-            </a:extLst>
-          </p:cNvPr>
-          <p:cNvSpPr txBox="1"/>
-          <p:nvPr/>
-        </p:nvSpPr>
-        <p:spPr>
-          <a:xfrm>
-            <a:off x="5473875" y="2243677"/>
-            <a:ext cx="324128" cy="369332"/>
-          </a:xfrm>
-          <a:prstGeom prst="rect">
-            <a:avLst/>
-          </a:prstGeom>
-          <a:noFill/>
-        </p:spPr>
-        <p:txBody>
-          <a:bodyPr wrap="none" rtlCol="0">
-            <a:spAutoFit/>
-          </a:bodyPr>
-          <a:lstStyle/>
-          <a:p>
-            <a:r>
-              <a:rPr lang="en-US" dirty="0"/>
-              <a:t>B</a:t>
-            </a:r>
-          </a:p>
-        </p:txBody>
-      </p:sp>
+      <mc:AlternateContent xmlns:mc="http://schemas.openxmlformats.org/markup-compatibility/2006">
+        <mc:Choice xmlns:a14="http://schemas.microsoft.com/office/drawing/2010/main" Requires="a14">
+          <p:sp>
+            <p:nvSpPr>
+              <p:cNvPr id="111" name="TextBox 110">
+                <a:extLst>
+                  <a:ext uri="{FF2B5EF4-FFF2-40B4-BE49-F238E27FC236}">
+                    <a16:creationId xmlns:a16="http://schemas.microsoft.com/office/drawing/2014/main" id="{C1D9E375-D93C-69DA-0B8E-2AA6961B8FA1}"/>
+                  </a:ext>
+                </a:extLst>
+              </p:cNvPr>
+              <p:cNvSpPr txBox="1"/>
+              <p:nvPr/>
+            </p:nvSpPr>
+            <p:spPr>
+              <a:xfrm>
+                <a:off x="4788075" y="1366905"/>
+                <a:ext cx="503664" cy="523220"/>
+              </a:xfrm>
+              <a:prstGeom prst="rect">
+                <a:avLst/>
+              </a:prstGeom>
+              <a:noFill/>
+            </p:spPr>
+            <p:txBody>
+              <a:bodyPr wrap="none" rtlCol="0">
+                <a:spAutoFit/>
+              </a:bodyPr>
+              <a:lstStyle/>
+              <a:p>
+                <a14:m>
+                  <m:oMathPara xmlns:m="http://schemas.openxmlformats.org/officeDocument/2006/math">
+                    <m:oMathParaPr>
+                      <m:jc m:val="centerGroup"/>
+                    </m:oMathParaPr>
+                    <m:oMath xmlns:m="http://schemas.openxmlformats.org/officeDocument/2006/math">
+                      <m:r>
+                        <a:rPr lang="en-US" sz="2800" i="1" dirty="0" smtClean="0">
+                          <a:latin typeface="Cambria Math" panose="02040503050406030204" pitchFamily="18" charset="0"/>
+                        </a:rPr>
+                        <m:t>𝐵</m:t>
+                      </m:r>
+                    </m:oMath>
+                  </m:oMathPara>
+                </a14:m>
+                <a:endParaRPr lang="en-US" sz="2800" dirty="0"/>
+              </a:p>
+            </p:txBody>
+          </p:sp>
+        </mc:Choice>
+        <mc:Fallback>
+          <p:sp>
+            <p:nvSpPr>
+              <p:cNvPr id="111" name="TextBox 110">
+                <a:extLst>
+                  <a:ext uri="{FF2B5EF4-FFF2-40B4-BE49-F238E27FC236}">
+                    <a16:creationId xmlns:a16="http://schemas.microsoft.com/office/drawing/2014/main" id="{C1D9E375-D93C-69DA-0B8E-2AA6961B8FA1}"/>
+                  </a:ext>
+                </a:extLst>
+              </p:cNvPr>
+              <p:cNvSpPr txBox="1">
+                <a:spLocks noRot="1" noChangeAspect="1" noMove="1" noResize="1" noEditPoints="1" noAdjustHandles="1" noChangeArrowheads="1" noChangeShapeType="1" noTextEdit="1"/>
+              </p:cNvSpPr>
+              <p:nvPr/>
+            </p:nvSpPr>
+            <p:spPr>
+              <a:xfrm>
+                <a:off x="4788075" y="1366905"/>
+                <a:ext cx="503664" cy="523220"/>
+              </a:xfrm>
+              <a:prstGeom prst="rect">
+                <a:avLst/>
+              </a:prstGeom>
+              <a:blipFill>
+                <a:blip r:embed="rId8"/>
+                <a:stretch>
+                  <a:fillRect/>
+                </a:stretch>
+              </a:blipFill>
+            </p:spPr>
+            <p:txBody>
+              <a:bodyPr/>
+              <a:lstStyle/>
+              <a:p>
+                <a:r>
+                  <a:rPr lang="en-US">
+                    <a:noFill/>
+                  </a:rPr>
+                  <a:t> </a:t>
+                </a:r>
+              </a:p>
+            </p:txBody>
+          </p:sp>
+        </mc:Fallback>
+      </mc:AlternateContent>
       <p:cxnSp>
         <p:nvCxnSpPr>
           <p:cNvPr id="113" name="Curved Connector 112">
@@ -4429,18 +4127,18 @@
           <p:cNvCxnSpPr>
             <a:cxnSpLocks/>
             <a:stCxn id="37" idx="0"/>
-            <a:endCxn id="101" idx="0"/>
+            <a:endCxn id="21" idx="0"/>
           </p:cNvCxnSpPr>
           <p:nvPr/>
         </p:nvCxnSpPr>
         <p:spPr>
           <a:xfrm rot="5400000" flipH="1" flipV="1">
-            <a:off x="6421426" y="-2077444"/>
-            <a:ext cx="775276" cy="7866966"/>
+            <a:off x="6168330" y="-2577574"/>
+            <a:ext cx="83939" cy="7757765"/>
           </a:xfrm>
           <a:prstGeom prst="curvedConnector3">
             <a:avLst>
-              <a:gd name="adj1" fmla="val 253894"/>
+              <a:gd name="adj1" fmla="val 1448418"/>
             </a:avLst>
           </a:prstGeom>
           <a:ln>
@@ -4482,8 +4180,8 @@
             </p:nvSpPr>
             <p:spPr>
               <a:xfrm>
-                <a:off x="9703543" y="3382442"/>
-                <a:ext cx="2078005" cy="923330"/>
+                <a:off x="8542187" y="2505670"/>
+                <a:ext cx="3093989" cy="1384995"/>
               </a:xfrm>
               <a:prstGeom prst="rect">
                 <a:avLst/>
@@ -4509,13 +4207,13 @@
                     </m:oMathParaPr>
                     <m:oMath xmlns:m="http://schemas.openxmlformats.org/officeDocument/2006/math">
                       <m:r>
-                        <a:rPr lang="el-GR" i="1" smtClean="0">
+                        <a:rPr lang="el-GR" sz="2800" i="1" smtClean="0">
                           <a:latin typeface="Cambria Math" panose="02040503050406030204" pitchFamily="18" charset="0"/>
                         </a:rPr>
                         <m:t>𝜎</m:t>
                       </m:r>
                       <m:r>
-                        <a:rPr lang="en-US" b="0" i="1" smtClean="0">
+                        <a:rPr lang="en-US" sz="2800" b="0" i="1" smtClean="0">
                           <a:latin typeface="Cambria Math" panose="02040503050406030204" pitchFamily="18" charset="0"/>
                         </a:rPr>
                         <m:t>=</m:t>
@@ -4523,7 +4221,7 @@
                       <m:sSub>
                         <m:sSubPr>
                           <m:ctrlPr>
-                            <a:rPr lang="en-US" b="0" i="1" smtClean="0">
+                            <a:rPr lang="en-US" sz="2800" b="0" i="1" smtClean="0">
                               <a:latin typeface="Cambria Math" panose="02040503050406030204" pitchFamily="18" charset="0"/>
                             </a:rPr>
                           </m:ctrlPr>
@@ -4533,7 +4231,7 @@
                             <m:rPr>
                               <m:sty m:val="p"/>
                             </m:rPr>
-                            <a:rPr lang="el-GR" b="0" i="0" smtClean="0">
+                            <a:rPr lang="el-GR" sz="2800" b="0" i="0" smtClean="0">
                               <a:latin typeface="Cambria Math" panose="02040503050406030204" pitchFamily="18" charset="0"/>
                             </a:rPr>
                             <m:t>Τ</m:t>
@@ -4541,7 +4239,7 @@
                         </m:e>
                         <m:sub>
                           <m:r>
-                            <a:rPr lang="en-US" b="0" i="1" smtClean="0">
+                            <a:rPr lang="en-US" sz="2800" b="0" i="1" smtClean="0">
                               <a:latin typeface="Cambria Math" panose="02040503050406030204" pitchFamily="18" charset="0"/>
                             </a:rPr>
                             <m:t>𝐵</m:t>
@@ -4549,19 +4247,22 @@
                         </m:sub>
                       </m:sSub>
                       <m:r>
-                        <a:rPr lang="en-US" b="0" i="1" smtClean="0">
+                        <a:rPr lang="en-US" sz="2800" b="0" i="1" smtClean="0">
                           <a:latin typeface="Cambria Math" panose="02040503050406030204" pitchFamily="18" charset="0"/>
                         </a:rPr>
                         <m:t>⊖{</m:t>
                       </m:r>
                       <m:r>
-                        <a:rPr lang="en-US" b="0" i="1" smtClean="0">
+                        <m:rPr>
+                          <m:sty m:val="p"/>
+                        </m:rPr>
+                        <a:rPr lang="en-US" sz="2800" b="0" i="1" smtClean="0">
                           <a:latin typeface="Cambria Math" panose="02040503050406030204" pitchFamily="18" charset="0"/>
                         </a:rPr>
-                        <m:t>𝐷𝑎𝑡𝑎</m:t>
+                        <m:t>y</m:t>
                       </m:r>
                       <m:r>
-                        <a:rPr lang="en-US" b="0" i="1" smtClean="0">
+                        <a:rPr lang="en-US" sz="2800" b="0" i="1" smtClean="0">
                           <a:latin typeface="Cambria Math" panose="02040503050406030204" pitchFamily="18" charset="0"/>
                         </a:rPr>
                         <m:t>}</m:t>
@@ -4569,7 +4270,7 @@
                     </m:oMath>
                   </m:oMathPara>
                 </a14:m>
-                <a:endParaRPr lang="en-US" b="0" i="1" dirty="0">
+                <a:endParaRPr lang="en-US" sz="2800" b="0" i="1" dirty="0">
                   <a:latin typeface="Cambria Math" panose="02040503050406030204" pitchFamily="18" charset="0"/>
                 </a:endParaRPr>
               </a:p>
@@ -4582,7 +4283,7 @@
                     </m:oMathParaPr>
                     <m:oMath xmlns:m="http://schemas.openxmlformats.org/officeDocument/2006/math">
                       <m:r>
-                        <a:rPr lang="en-US" b="0" i="1" smtClean="0">
+                        <a:rPr lang="en-US" sz="2800" b="0" i="1" smtClean="0">
                           <a:latin typeface="Cambria Math" panose="02040503050406030204" pitchFamily="18" charset="0"/>
                         </a:rPr>
                         <m:t>𝑅𝐴𝑁𝐷</m:t>
@@ -4590,14 +4291,14 @@
                       <m:d>
                         <m:dPr>
                           <m:ctrlPr>
-                            <a:rPr lang="en-US" b="0" i="1" smtClean="0">
+                            <a:rPr lang="en-US" sz="2800" b="0" i="1" smtClean="0">
                               <a:latin typeface="Cambria Math" panose="02040503050406030204" pitchFamily="18" charset="0"/>
                             </a:rPr>
                           </m:ctrlPr>
                         </m:dPr>
                         <m:e>
                           <m:r>
-                            <a:rPr lang="el-GR" b="0" i="1" smtClean="0">
+                            <a:rPr lang="el-GR" sz="2800" b="0" i="1" smtClean="0">
                               <a:latin typeface="Cambria Math" panose="02040503050406030204" pitchFamily="18" charset="0"/>
                             </a:rPr>
                             <m:t>𝜎</m:t>
@@ -4605,7 +4306,7 @@
                         </m:e>
                       </m:d>
                       <m:r>
-                        <a:rPr lang="en-US" b="0" i="1" smtClean="0">
+                        <a:rPr lang="en-US" sz="2800" b="0" i="1" smtClean="0">
                           <a:latin typeface="Cambria Math" panose="02040503050406030204" pitchFamily="18" charset="0"/>
                         </a:rPr>
                         <m:t>=</m:t>
@@ -4615,26 +4316,26 @@
                           <m:begChr m:val="⟨"/>
                           <m:endChr m:val="⟩"/>
                           <m:ctrlPr>
-                            <a:rPr lang="en-US" b="0" i="1" smtClean="0">
+                            <a:rPr lang="en-US" sz="2800" b="0" i="1" smtClean="0">
                               <a:latin typeface="Cambria Math" panose="02040503050406030204" pitchFamily="18" charset="0"/>
                             </a:rPr>
                           </m:ctrlPr>
                         </m:dPr>
                         <m:e>
                           <m:r>
-                            <a:rPr lang="en-US" b="0" i="1" smtClean="0">
+                            <a:rPr lang="en-US" sz="2800" b="0" i="1" smtClean="0">
                               <a:latin typeface="Cambria Math" panose="02040503050406030204" pitchFamily="18" charset="0"/>
                             </a:rPr>
                             <m:t>𝑣</m:t>
                           </m:r>
                           <m:r>
-                            <a:rPr lang="en-US" b="0" i="1" smtClean="0">
+                            <a:rPr lang="en-US" sz="2800" b="0" i="1" smtClean="0">
                               <a:latin typeface="Cambria Math" panose="02040503050406030204" pitchFamily="18" charset="0"/>
                             </a:rPr>
                             <m:t>,</m:t>
                           </m:r>
                           <m:r>
-                            <a:rPr lang="en-US" b="0" i="1" smtClean="0">
+                            <a:rPr lang="en-US" sz="2800" b="0" i="1" smtClean="0">
                               <a:latin typeface="Cambria Math" panose="02040503050406030204" pitchFamily="18" charset="0"/>
                             </a:rPr>
                             <m:t>𝑤</m:t>
@@ -4644,7 +4345,7 @@
                     </m:oMath>
                   </m:oMathPara>
                 </a14:m>
-                <a:endParaRPr lang="en-US" b="0" dirty="0"/>
+                <a:endParaRPr lang="en-US" sz="2800" b="0" dirty="0"/>
               </a:p>
               <a:p>
                 <a:pPr/>
@@ -4654,66 +4355,38 @@
                       <m:jc m:val="centerGroup"/>
                     </m:oMathParaPr>
                     <m:oMath xmlns:m="http://schemas.openxmlformats.org/officeDocument/2006/math">
-                      <m:sSub>
-                        <m:sSubPr>
-                          <m:ctrlPr>
-                            <a:rPr lang="en-US" b="0" i="1" smtClean="0">
-                              <a:latin typeface="Cambria Math" panose="02040503050406030204" pitchFamily="18" charset="0"/>
-                            </a:rPr>
-                          </m:ctrlPr>
-                        </m:sSubPr>
-                        <m:e>
-                          <m:r>
-                            <a:rPr lang="en-US" b="0" i="1" smtClean="0">
-                              <a:latin typeface="Cambria Math" panose="02040503050406030204" pitchFamily="18" charset="0"/>
-                            </a:rPr>
-                            <m:t>𝐶</m:t>
-                          </m:r>
-                        </m:e>
-                        <m:sub>
-                          <m:r>
-                            <a:rPr lang="en-US" b="0" i="1" smtClean="0">
-                              <a:latin typeface="Cambria Math" panose="02040503050406030204" pitchFamily="18" charset="0"/>
-                            </a:rPr>
-                            <m:t>𝐷</m:t>
-                          </m:r>
-                          <m:r>
-                            <m:rPr>
-                              <m:sty m:val="p"/>
-                            </m:rPr>
-                            <a:rPr lang="en-US" b="0" i="1" smtClean="0">
-                              <a:latin typeface="Cambria Math" panose="02040503050406030204" pitchFamily="18" charset="0"/>
-                            </a:rPr>
-                            <m:t>ata</m:t>
-                          </m:r>
-                        </m:sub>
-                      </m:sSub>
                       <m:r>
-                        <a:rPr lang="en-US" b="0" i="1" smtClean="0">
+                        <a:rPr lang="en-US" sz="2800" b="0" i="1" smtClean="0">
+                          <a:latin typeface="Cambria Math" panose="02040503050406030204" pitchFamily="18" charset="0"/>
+                        </a:rPr>
+                        <m:t>𝐶</m:t>
+                      </m:r>
+                      <m:r>
+                        <a:rPr lang="en-US" sz="2800" b="0" i="1" smtClean="0">
                           <a:latin typeface="Cambria Math" panose="02040503050406030204" pitchFamily="18" charset="0"/>
                         </a:rPr>
                         <m:t>={</m:t>
                       </m:r>
                       <m:r>
-                        <a:rPr lang="en-US" b="0" i="1" smtClean="0">
+                        <a:rPr lang="en-US" sz="2800" b="0" i="1" smtClean="0">
                           <a:latin typeface="Cambria Math" panose="02040503050406030204" pitchFamily="18" charset="0"/>
                         </a:rPr>
                         <m:t>𝑣</m:t>
                       </m:r>
                       <m:r>
-                        <a:rPr lang="en-US" b="0" i="1" smtClean="0">
+                        <a:rPr lang="en-US" sz="2800" b="0" i="1" smtClean="0">
                           <a:latin typeface="Cambria Math" panose="02040503050406030204" pitchFamily="18" charset="0"/>
                         </a:rPr>
                         <m:t>, </m:t>
                       </m:r>
                       <m:r>
-                        <a:rPr lang="en-US" b="0" i="1" smtClean="0">
+                        <a:rPr lang="en-US" sz="2800" b="0" i="1" smtClean="0">
                           <a:latin typeface="Cambria Math" panose="02040503050406030204" pitchFamily="18" charset="0"/>
                         </a:rPr>
                         <m:t>𝑤</m:t>
                       </m:r>
                       <m:r>
-                        <a:rPr lang="en-US" b="0" i="1" smtClean="0">
+                        <a:rPr lang="en-US" sz="2800" b="0" i="1" smtClean="0">
                           <a:latin typeface="Cambria Math" panose="02040503050406030204" pitchFamily="18" charset="0"/>
                         </a:rPr>
                         <m:t>}</m:t>
@@ -4721,7 +4394,7 @@
                     </m:oMath>
                   </m:oMathPara>
                 </a14:m>
-                <a:endParaRPr lang="en-US" dirty="0"/>
+                <a:endParaRPr lang="en-US" sz="2800" dirty="0"/>
               </a:p>
             </p:txBody>
           </p:sp>
@@ -4743,16 +4416,16 @@
             </p:nvSpPr>
             <p:spPr>
               <a:xfrm>
-                <a:off x="9703543" y="3382442"/>
-                <a:ext cx="2078005" cy="923330"/>
+                <a:off x="8542187" y="2505670"/>
+                <a:ext cx="3093989" cy="1384995"/>
               </a:xfrm>
               <a:prstGeom prst="rect">
                 <a:avLst/>
               </a:prstGeom>
               <a:blipFill>
-                <a:blip r:embed="rId8"/>
+                <a:blip r:embed="rId9"/>
                 <a:stretch>
-                  <a:fillRect b="-4000"/>
+                  <a:fillRect b="-5405"/>
                 </a:stretch>
               </a:blipFill>
               <a:ln>
@@ -4776,6 +4449,41 @@
           </p:sp>
         </mc:Fallback>
       </mc:AlternateContent>
+      <p:sp>
+        <p:nvSpPr>
+          <p:cNvPr id="9" name="TextBox 8">
+            <a:extLst>
+              <a:ext uri="{FF2B5EF4-FFF2-40B4-BE49-F238E27FC236}">
+                <a16:creationId xmlns:a16="http://schemas.microsoft.com/office/drawing/2014/main" id="{22AD0679-0FB5-8FC9-962A-31760854426E}"/>
+              </a:ext>
+            </a:extLst>
+          </p:cNvPr>
+          <p:cNvSpPr txBox="1"/>
+          <p:nvPr/>
+        </p:nvSpPr>
+        <p:spPr>
+          <a:xfrm>
+            <a:off x="10233792" y="2139649"/>
+            <a:ext cx="1004121" cy="400110"/>
+          </a:xfrm>
+          <a:prstGeom prst="rect">
+            <a:avLst/>
+          </a:prstGeom>
+          <a:noFill/>
+        </p:spPr>
+        <p:txBody>
+          <a:bodyPr wrap="none" rtlCol="0">
+            <a:spAutoFit/>
+          </a:bodyPr>
+          <a:lstStyle/>
+          <a:p>
+            <a:r>
+              <a:rPr lang="en-US" sz="2000" b="1" dirty="0"/>
+              <a:t>Search</a:t>
+            </a:r>
+          </a:p>
+        </p:txBody>
+      </p:sp>
     </p:spTree>
     <p:extLst>
       <p:ext uri="{BB962C8B-B14F-4D97-AF65-F5344CB8AC3E}">
